--- a/4 - Calibração/Lendo Log.pptx
+++ b/4 - Calibração/Lendo Log.pptx
@@ -17,8 +17,9 @@
     <p:sldId id="294" r:id="rId11"/>
     <p:sldId id="291" r:id="rId12"/>
     <p:sldId id="293" r:id="rId13"/>
-    <p:sldId id="295" r:id="rId14"/>
-    <p:sldId id="296" r:id="rId15"/>
+    <p:sldId id="296" r:id="rId14"/>
+    <p:sldId id="297" r:id="rId15"/>
+    <p:sldId id="298" r:id="rId16"/>
   </p:sldIdLst>
   <p:sldSz cx="12192000" cy="6858000"/>
   <p:notesSz cx="6858000" cy="9144000"/>
@@ -272,7 +273,7 @@
           <a:p>
             <a:fld id="{BA3C2D6C-CD43-49C3-BA7B-151C84375194}" type="datetimeFigureOut">
               <a:rPr lang="pt-BR" smtClean="0"/>
-              <a:t>23/09/2026</a:t>
+              <a:t>24/09/2026</a:t>
             </a:fld>
             <a:endParaRPr lang="pt-BR"/>
           </a:p>
@@ -470,7 +471,7 @@
           <a:p>
             <a:fld id="{BA3C2D6C-CD43-49C3-BA7B-151C84375194}" type="datetimeFigureOut">
               <a:rPr lang="pt-BR" smtClean="0"/>
-              <a:t>23/09/2026</a:t>
+              <a:t>24/09/2026</a:t>
             </a:fld>
             <a:endParaRPr lang="pt-BR"/>
           </a:p>
@@ -678,7 +679,7 @@
           <a:p>
             <a:fld id="{BA3C2D6C-CD43-49C3-BA7B-151C84375194}" type="datetimeFigureOut">
               <a:rPr lang="pt-BR" smtClean="0"/>
-              <a:t>23/09/2026</a:t>
+              <a:t>24/09/2026</a:t>
             </a:fld>
             <a:endParaRPr lang="pt-BR"/>
           </a:p>
@@ -876,7 +877,7 @@
           <a:p>
             <a:fld id="{BA3C2D6C-CD43-49C3-BA7B-151C84375194}" type="datetimeFigureOut">
               <a:rPr lang="pt-BR" smtClean="0"/>
-              <a:t>23/09/2026</a:t>
+              <a:t>24/09/2026</a:t>
             </a:fld>
             <a:endParaRPr lang="pt-BR"/>
           </a:p>
@@ -1151,7 +1152,7 @@
           <a:p>
             <a:fld id="{BA3C2D6C-CD43-49C3-BA7B-151C84375194}" type="datetimeFigureOut">
               <a:rPr lang="pt-BR" smtClean="0"/>
-              <a:t>23/09/2026</a:t>
+              <a:t>24/09/2026</a:t>
             </a:fld>
             <a:endParaRPr lang="pt-BR"/>
           </a:p>
@@ -1416,7 +1417,7 @@
           <a:p>
             <a:fld id="{BA3C2D6C-CD43-49C3-BA7B-151C84375194}" type="datetimeFigureOut">
               <a:rPr lang="pt-BR" smtClean="0"/>
-              <a:t>23/09/2026</a:t>
+              <a:t>24/09/2026</a:t>
             </a:fld>
             <a:endParaRPr lang="pt-BR"/>
           </a:p>
@@ -1828,7 +1829,7 @@
           <a:p>
             <a:fld id="{BA3C2D6C-CD43-49C3-BA7B-151C84375194}" type="datetimeFigureOut">
               <a:rPr lang="pt-BR" smtClean="0"/>
-              <a:t>23/09/2026</a:t>
+              <a:t>24/09/2026</a:t>
             </a:fld>
             <a:endParaRPr lang="pt-BR"/>
           </a:p>
@@ -1969,7 +1970,7 @@
           <a:p>
             <a:fld id="{BA3C2D6C-CD43-49C3-BA7B-151C84375194}" type="datetimeFigureOut">
               <a:rPr lang="pt-BR" smtClean="0"/>
-              <a:t>23/09/2026</a:t>
+              <a:t>24/09/2026</a:t>
             </a:fld>
             <a:endParaRPr lang="pt-BR"/>
           </a:p>
@@ -2082,7 +2083,7 @@
           <a:p>
             <a:fld id="{BA3C2D6C-CD43-49C3-BA7B-151C84375194}" type="datetimeFigureOut">
               <a:rPr lang="pt-BR" smtClean="0"/>
-              <a:t>23/09/2026</a:t>
+              <a:t>24/09/2026</a:t>
             </a:fld>
             <a:endParaRPr lang="pt-BR"/>
           </a:p>
@@ -2393,7 +2394,7 @@
           <a:p>
             <a:fld id="{BA3C2D6C-CD43-49C3-BA7B-151C84375194}" type="datetimeFigureOut">
               <a:rPr lang="pt-BR" smtClean="0"/>
-              <a:t>23/09/2026</a:t>
+              <a:t>24/09/2026</a:t>
             </a:fld>
             <a:endParaRPr lang="pt-BR"/>
           </a:p>
@@ -2681,7 +2682,7 @@
           <a:p>
             <a:fld id="{BA3C2D6C-CD43-49C3-BA7B-151C84375194}" type="datetimeFigureOut">
               <a:rPr lang="pt-BR" smtClean="0"/>
-              <a:t>23/09/2026</a:t>
+              <a:t>24/09/2026</a:t>
             </a:fld>
             <a:endParaRPr lang="pt-BR"/>
           </a:p>
@@ -2922,7 +2923,7 @@
           <a:p>
             <a:fld id="{BA3C2D6C-CD43-49C3-BA7B-151C84375194}" type="datetimeFigureOut">
               <a:rPr lang="pt-BR" smtClean="0"/>
-              <a:t>23/09/2026</a:t>
+              <a:t>24/09/2026</a:t>
             </a:fld>
             <a:endParaRPr lang="pt-BR"/>
           </a:p>
@@ -6610,10 +6611,70 @@
           <a:chExt cx="0" cy="0"/>
         </a:xfrm>
       </p:grpSpPr>
+      <p:sp>
+        <p:nvSpPr>
+          <p:cNvPr id="2" name="Título 1">
+            <a:extLst>
+              <a:ext uri="{FF2B5EF4-FFF2-40B4-BE49-F238E27FC236}">
+                <a16:creationId xmlns:a16="http://schemas.microsoft.com/office/drawing/2014/main" id="{45905AC0-1CAD-A3A4-A552-0E49046683A7}"/>
+              </a:ext>
+            </a:extLst>
+          </p:cNvPr>
+          <p:cNvSpPr>
+            <a:spLocks noGrp="1"/>
+          </p:cNvSpPr>
+          <p:nvPr>
+            <p:ph type="ctrTitle"/>
+          </p:nvPr>
+        </p:nvSpPr>
+        <p:spPr/>
+        <p:txBody>
+          <a:bodyPr/>
+          <a:lstStyle/>
+          <a:p>
+            <a:r>
+              <a:rPr lang="pt-BR" dirty="0"/>
+              <a:t>Realizar Novamente Testes</a:t>
+            </a:r>
+          </a:p>
+        </p:txBody>
+      </p:sp>
+      <p:sp>
+        <p:nvSpPr>
+          <p:cNvPr id="3" name="Subtítulo 2">
+            <a:extLst>
+              <a:ext uri="{FF2B5EF4-FFF2-40B4-BE49-F238E27FC236}">
+                <a16:creationId xmlns:a16="http://schemas.microsoft.com/office/drawing/2014/main" id="{486AAD1F-6C78-0759-42A8-731F8469B076}"/>
+              </a:ext>
+            </a:extLst>
+          </p:cNvPr>
+          <p:cNvSpPr>
+            <a:spLocks noGrp="1"/>
+          </p:cNvSpPr>
+          <p:nvPr>
+            <p:ph type="subTitle" idx="1"/>
+          </p:nvPr>
+        </p:nvSpPr>
+        <p:spPr/>
+        <p:txBody>
+          <a:bodyPr/>
+          <a:lstStyle/>
+          <a:p>
+            <a:r>
+              <a:rPr lang="pt-BR" dirty="0"/>
+              <a:t>Aumentando </a:t>
+            </a:r>
+            <a:r>
+              <a:rPr lang="pt-BR"/>
+              <a:t>a velocidade</a:t>
+            </a:r>
+          </a:p>
+        </p:txBody>
+      </p:sp>
     </p:spTree>
     <p:extLst>
       <p:ext uri="{BB962C8B-B14F-4D97-AF65-F5344CB8AC3E}">
-        <p14:creationId xmlns:p14="http://schemas.microsoft.com/office/powerpoint/2010/main" val="2855778612"/>
+        <p14:creationId xmlns:p14="http://schemas.microsoft.com/office/powerpoint/2010/main" val="1170234007"/>
       </p:ext>
     </p:extLst>
   </p:cSld>
@@ -6626,6 +6687,17 @@
 <file path=ppt/slides/slide14.xml><?xml version="1.0" encoding="utf-8"?>
 <p:sld xmlns:a="http://schemas.openxmlformats.org/drawingml/2006/main" xmlns:r="http://schemas.openxmlformats.org/officeDocument/2006/relationships" xmlns:p="http://schemas.openxmlformats.org/presentationml/2006/main">
   <p:cSld>
+    <p:bg>
+      <p:bgPr>
+        <a:solidFill>
+          <a:schemeClr val="tx1">
+            <a:lumMod val="85000"/>
+            <a:lumOff val="15000"/>
+          </a:schemeClr>
+        </a:solidFill>
+        <a:effectLst/>
+      </p:bgPr>
+    </p:bg>
     <p:spTree>
       <p:nvGrpSpPr>
         <p:cNvPr id="1" name=""/>
@@ -6640,62 +6712,779 @@
           <a:chExt cx="0" cy="0"/>
         </a:xfrm>
       </p:grpSpPr>
+      <p:pic>
+        <p:nvPicPr>
+          <p:cNvPr id="9" name="Imagem 8">
+            <a:extLst>
+              <a:ext uri="{FF2B5EF4-FFF2-40B4-BE49-F238E27FC236}">
+                <a16:creationId xmlns:a16="http://schemas.microsoft.com/office/drawing/2014/main" id="{B4440524-6EC7-A285-4D6A-452F43C0AAEA}"/>
+              </a:ext>
+            </a:extLst>
+          </p:cNvPr>
+          <p:cNvPicPr>
+            <a:picLocks noChangeAspect="1"/>
+          </p:cNvPicPr>
+          <p:nvPr/>
+        </p:nvPicPr>
+        <p:blipFill>
+          <a:blip r:embed="rId2"/>
+          <a:stretch>
+            <a:fillRect/>
+          </a:stretch>
+        </p:blipFill>
+        <p:spPr>
+          <a:xfrm>
+            <a:off x="0" y="0"/>
+            <a:ext cx="7223580" cy="6858000"/>
+          </a:xfrm>
+          <a:prstGeom prst="rect">
+            <a:avLst/>
+          </a:prstGeom>
+        </p:spPr>
+      </p:pic>
       <p:sp>
         <p:nvSpPr>
-          <p:cNvPr id="2" name="Título 1">
-            <a:extLst>
-              <a:ext uri="{FF2B5EF4-FFF2-40B4-BE49-F238E27FC236}">
-                <a16:creationId xmlns:a16="http://schemas.microsoft.com/office/drawing/2014/main" id="{45905AC0-1CAD-A3A4-A552-0E49046683A7}"/>
-              </a:ext>
-            </a:extLst>
-          </p:cNvPr>
-          <p:cNvSpPr>
-            <a:spLocks noGrp="1"/>
-          </p:cNvSpPr>
-          <p:nvPr>
-            <p:ph type="ctrTitle"/>
-          </p:nvPr>
+          <p:cNvPr id="3" name="CaixaDeTexto 2">
+            <a:extLst>
+              <a:ext uri="{FF2B5EF4-FFF2-40B4-BE49-F238E27FC236}">
+                <a16:creationId xmlns:a16="http://schemas.microsoft.com/office/drawing/2014/main" id="{CE33EDE8-5357-64D0-16B4-C60549F7E362}"/>
+              </a:ext>
+            </a:extLst>
+          </p:cNvPr>
+          <p:cNvSpPr txBox="1"/>
+          <p:nvPr/>
         </p:nvSpPr>
-        <p:spPr/>
+        <p:spPr>
+          <a:xfrm>
+            <a:off x="6918960" y="1105671"/>
+            <a:ext cx="4744720" cy="4646657"/>
+          </a:xfrm>
+          <a:prstGeom prst="rect">
+            <a:avLst/>
+          </a:prstGeom>
+          <a:noFill/>
+        </p:spPr>
         <p:txBody>
-          <a:bodyPr/>
+          <a:bodyPr wrap="square">
+            <a:spAutoFit/>
+          </a:bodyPr>
           <a:lstStyle/>
           <a:p>
-            <a:r>
-              <a:rPr lang="pt-BR" dirty="0"/>
-              <a:t>Realizar Novamente Testes</a:t>
-            </a:r>
-          </a:p>
-        </p:txBody>
-      </p:sp>
-      <p:sp>
-        <p:nvSpPr>
-          <p:cNvPr id="3" name="Subtítulo 2">
-            <a:extLst>
-              <a:ext uri="{FF2B5EF4-FFF2-40B4-BE49-F238E27FC236}">
-                <a16:creationId xmlns:a16="http://schemas.microsoft.com/office/drawing/2014/main" id="{486AAD1F-6C78-0759-42A8-731F8469B076}"/>
-              </a:ext>
-            </a:extLst>
-          </p:cNvPr>
-          <p:cNvSpPr>
-            <a:spLocks noGrp="1"/>
-          </p:cNvSpPr>
-          <p:nvPr>
-            <p:ph type="subTitle" idx="1"/>
-          </p:nvPr>
-        </p:nvSpPr>
-        <p:spPr/>
-        <p:txBody>
-          <a:bodyPr/>
-          <a:lstStyle/>
-          <a:p>
-            <a:r>
-              <a:rPr lang="pt-BR" dirty="0"/>
-              <a:t>Aumentando </a:t>
-            </a:r>
-            <a:r>
-              <a:rPr lang="pt-BR"/>
-              <a:t>a velocidade</a:t>
+            <a:pPr>
+              <a:lnSpc>
+                <a:spcPct val="113095"/>
+              </a:lnSpc>
+              <a:buNone/>
+            </a:pPr>
+            <a:r>
+              <a:rPr lang="pt-BR" sz="1050" b="0" dirty="0">
+                <a:solidFill>
+                  <a:srgbClr val="CCCCCC"/>
+                </a:solidFill>
+                <a:effectLst/>
+                <a:latin typeface="Consolas" panose="020B0609020204030204" pitchFamily="49" charset="0"/>
+              </a:rPr>
+              <a:t>      </a:t>
+            </a:r>
+            <a:r>
+              <a:rPr lang="pt-BR" sz="1050" b="0" dirty="0">
+                <a:solidFill>
+                  <a:srgbClr val="4EC9B0"/>
+                </a:solidFill>
+                <a:effectLst/>
+                <a:latin typeface="Consolas" panose="020B0609020204030204" pitchFamily="49" charset="0"/>
+              </a:rPr>
+              <a:t>Slot0Configs</a:t>
+            </a:r>
+            <a:r>
+              <a:rPr lang="pt-BR" sz="1050" b="0" dirty="0">
+                <a:solidFill>
+                  <a:srgbClr val="CCCCCC"/>
+                </a:solidFill>
+                <a:effectLst/>
+                <a:latin typeface="Consolas" panose="020B0609020204030204" pitchFamily="49" charset="0"/>
+              </a:rPr>
+              <a:t> </a:t>
+            </a:r>
+            <a:r>
+              <a:rPr lang="pt-BR" sz="1050" b="0" dirty="0" err="1">
+                <a:solidFill>
+                  <a:srgbClr val="9CDCFE"/>
+                </a:solidFill>
+                <a:effectLst/>
+                <a:latin typeface="Consolas" panose="020B0609020204030204" pitchFamily="49" charset="0"/>
+              </a:rPr>
+              <a:t>driveGains</a:t>
+            </a:r>
+            <a:r>
+              <a:rPr lang="pt-BR" sz="1050" b="0" dirty="0">
+                <a:solidFill>
+                  <a:srgbClr val="CCCCCC"/>
+                </a:solidFill>
+                <a:effectLst/>
+                <a:latin typeface="Consolas" panose="020B0609020204030204" pitchFamily="49" charset="0"/>
+              </a:rPr>
+              <a:t> </a:t>
+            </a:r>
+            <a:r>
+              <a:rPr lang="pt-BR" sz="1050" b="0" dirty="0">
+                <a:solidFill>
+                  <a:srgbClr val="D4D4D4"/>
+                </a:solidFill>
+                <a:effectLst/>
+                <a:latin typeface="Consolas" panose="020B0609020204030204" pitchFamily="49" charset="0"/>
+              </a:rPr>
+              <a:t>=</a:t>
+            </a:r>
+            <a:r>
+              <a:rPr lang="pt-BR" sz="1050" b="0" dirty="0">
+                <a:solidFill>
+                  <a:srgbClr val="CCCCCC"/>
+                </a:solidFill>
+                <a:effectLst/>
+                <a:latin typeface="Consolas" panose="020B0609020204030204" pitchFamily="49" charset="0"/>
+              </a:rPr>
+              <a:t> </a:t>
+            </a:r>
+            <a:r>
+              <a:rPr lang="pt-BR" sz="1050" b="0" dirty="0">
+                <a:solidFill>
+                  <a:srgbClr val="C586C0"/>
+                </a:solidFill>
+                <a:effectLst/>
+                <a:latin typeface="Consolas" panose="020B0609020204030204" pitchFamily="49" charset="0"/>
+              </a:rPr>
+              <a:t>new</a:t>
+            </a:r>
+            <a:r>
+              <a:rPr lang="pt-BR" sz="1050" b="0" dirty="0">
+                <a:solidFill>
+                  <a:srgbClr val="CCCCCC"/>
+                </a:solidFill>
+                <a:effectLst/>
+                <a:latin typeface="Consolas" panose="020B0609020204030204" pitchFamily="49" charset="0"/>
+              </a:rPr>
+              <a:t> </a:t>
+            </a:r>
+            <a:r>
+              <a:rPr lang="pt-BR" sz="1050" b="0" dirty="0">
+                <a:solidFill>
+                  <a:srgbClr val="DCDCAA"/>
+                </a:solidFill>
+                <a:effectLst/>
+                <a:latin typeface="Consolas" panose="020B0609020204030204" pitchFamily="49" charset="0"/>
+              </a:rPr>
+              <a:t>Slot0Configs</a:t>
+            </a:r>
+            <a:r>
+              <a:rPr lang="pt-BR" sz="1050" b="0" dirty="0">
+                <a:solidFill>
+                  <a:srgbClr val="CCCCCC"/>
+                </a:solidFill>
+                <a:effectLst/>
+                <a:latin typeface="Consolas" panose="020B0609020204030204" pitchFamily="49" charset="0"/>
+              </a:rPr>
+              <a:t>()</a:t>
+            </a:r>
+          </a:p>
+          <a:p>
+            <a:pPr>
+              <a:lnSpc>
+                <a:spcPct val="113095"/>
+              </a:lnSpc>
+              <a:buNone/>
+            </a:pPr>
+            <a:br>
+              <a:rPr lang="pt-BR" sz="1050" b="0" dirty="0">
+                <a:solidFill>
+                  <a:srgbClr val="CCCCCC"/>
+                </a:solidFill>
+                <a:effectLst/>
+                <a:latin typeface="Consolas" panose="020B0609020204030204" pitchFamily="49" charset="0"/>
+              </a:rPr>
+            </a:br>
+            <a:endParaRPr lang="pt-BR" sz="1050" b="0" dirty="0">
+              <a:solidFill>
+                <a:srgbClr val="CCCCCC"/>
+              </a:solidFill>
+              <a:effectLst/>
+              <a:latin typeface="Consolas" panose="020B0609020204030204" pitchFamily="49" charset="0"/>
+            </a:endParaRPr>
+          </a:p>
+          <a:p>
+            <a:pPr>
+              <a:lnSpc>
+                <a:spcPct val="113095"/>
+              </a:lnSpc>
+              <a:buNone/>
+            </a:pPr>
+            <a:r>
+              <a:rPr lang="pt-BR" sz="1050" b="0" dirty="0">
+                <a:solidFill>
+                  <a:srgbClr val="CCCCCC"/>
+                </a:solidFill>
+                <a:effectLst/>
+                <a:latin typeface="Consolas" panose="020B0609020204030204" pitchFamily="49" charset="0"/>
+              </a:rPr>
+              <a:t>                .</a:t>
+            </a:r>
+            <a:r>
+              <a:rPr lang="pt-BR" sz="1050" b="0" dirty="0" err="1">
+                <a:solidFill>
+                  <a:srgbClr val="DCDCAA"/>
+                </a:solidFill>
+                <a:effectLst/>
+                <a:latin typeface="Consolas" panose="020B0609020204030204" pitchFamily="49" charset="0"/>
+              </a:rPr>
+              <a:t>withKP</a:t>
+            </a:r>
+            <a:r>
+              <a:rPr lang="pt-BR" sz="1050" b="0" dirty="0">
+                <a:solidFill>
+                  <a:srgbClr val="CCCCCC"/>
+                </a:solidFill>
+                <a:effectLst/>
+                <a:latin typeface="Consolas" panose="020B0609020204030204" pitchFamily="49" charset="0"/>
+              </a:rPr>
+              <a:t>(</a:t>
+            </a:r>
+          </a:p>
+          <a:p>
+            <a:pPr>
+              <a:lnSpc>
+                <a:spcPct val="113095"/>
+              </a:lnSpc>
+              <a:buNone/>
+            </a:pPr>
+            <a:r>
+              <a:rPr lang="pt-BR" sz="1050" b="0" dirty="0">
+                <a:solidFill>
+                  <a:srgbClr val="CCCCCC"/>
+                </a:solidFill>
+                <a:effectLst/>
+                <a:latin typeface="Consolas" panose="020B0609020204030204" pitchFamily="49" charset="0"/>
+              </a:rPr>
+              <a:t>                </a:t>
+            </a:r>
+            <a:r>
+              <a:rPr lang="pt-BR" sz="1050" b="0" dirty="0">
+                <a:solidFill>
+                  <a:srgbClr val="B5CEA8"/>
+                </a:solidFill>
+                <a:effectLst/>
+                <a:latin typeface="Consolas" panose="020B0609020204030204" pitchFamily="49" charset="0"/>
+              </a:rPr>
+              <a:t>0.10</a:t>
+            </a:r>
+            <a:r>
+              <a:rPr lang="pt-BR" sz="1050" b="0" dirty="0">
+                <a:solidFill>
+                  <a:srgbClr val="CCCCCC"/>
+                </a:solidFill>
+                <a:effectLst/>
+                <a:latin typeface="Consolas" panose="020B0609020204030204" pitchFamily="49" charset="0"/>
+              </a:rPr>
+              <a:t>)</a:t>
+            </a:r>
+          </a:p>
+          <a:p>
+            <a:pPr>
+              <a:lnSpc>
+                <a:spcPct val="113095"/>
+              </a:lnSpc>
+              <a:buNone/>
+            </a:pPr>
+            <a:br>
+              <a:rPr lang="pt-BR" sz="1050" b="0" dirty="0">
+                <a:solidFill>
+                  <a:srgbClr val="CCCCCC"/>
+                </a:solidFill>
+                <a:effectLst/>
+                <a:latin typeface="Consolas" panose="020B0609020204030204" pitchFamily="49" charset="0"/>
+              </a:rPr>
+            </a:br>
+            <a:endParaRPr lang="pt-BR" sz="1050" b="0" dirty="0">
+              <a:solidFill>
+                <a:srgbClr val="CCCCCC"/>
+              </a:solidFill>
+              <a:effectLst/>
+              <a:latin typeface="Consolas" panose="020B0609020204030204" pitchFamily="49" charset="0"/>
+            </a:endParaRPr>
+          </a:p>
+          <a:p>
+            <a:pPr>
+              <a:lnSpc>
+                <a:spcPct val="113095"/>
+              </a:lnSpc>
+              <a:buNone/>
+            </a:pPr>
+            <a:r>
+              <a:rPr lang="pt-BR" sz="1050" b="0" dirty="0">
+                <a:solidFill>
+                  <a:srgbClr val="CCCCCC"/>
+                </a:solidFill>
+                <a:effectLst/>
+                <a:latin typeface="Consolas" panose="020B0609020204030204" pitchFamily="49" charset="0"/>
+              </a:rPr>
+              <a:t>                .</a:t>
+            </a:r>
+            <a:r>
+              <a:rPr lang="pt-BR" sz="1050" b="0" dirty="0" err="1">
+                <a:solidFill>
+                  <a:srgbClr val="DCDCAA"/>
+                </a:solidFill>
+                <a:effectLst/>
+                <a:latin typeface="Consolas" panose="020B0609020204030204" pitchFamily="49" charset="0"/>
+              </a:rPr>
+              <a:t>withKI</a:t>
+            </a:r>
+            <a:r>
+              <a:rPr lang="pt-BR" sz="1050" b="0" dirty="0">
+                <a:solidFill>
+                  <a:srgbClr val="CCCCCC"/>
+                </a:solidFill>
+                <a:effectLst/>
+                <a:latin typeface="Consolas" panose="020B0609020204030204" pitchFamily="49" charset="0"/>
+              </a:rPr>
+              <a:t>(</a:t>
+            </a:r>
+          </a:p>
+          <a:p>
+            <a:pPr>
+              <a:lnSpc>
+                <a:spcPct val="113095"/>
+              </a:lnSpc>
+              <a:buNone/>
+            </a:pPr>
+            <a:r>
+              <a:rPr lang="pt-BR" sz="1050" b="0" dirty="0">
+                <a:solidFill>
+                  <a:srgbClr val="CCCCCC"/>
+                </a:solidFill>
+                <a:effectLst/>
+                <a:latin typeface="Consolas" panose="020B0609020204030204" pitchFamily="49" charset="0"/>
+              </a:rPr>
+              <a:t>                </a:t>
+            </a:r>
+            <a:r>
+              <a:rPr lang="pt-BR" sz="1050" b="0" dirty="0">
+                <a:solidFill>
+                  <a:srgbClr val="B5CEA8"/>
+                </a:solidFill>
+                <a:effectLst/>
+                <a:latin typeface="Consolas" panose="020B0609020204030204" pitchFamily="49" charset="0"/>
+              </a:rPr>
+              <a:t>0.0</a:t>
+            </a:r>
+            <a:r>
+              <a:rPr lang="pt-BR" sz="1050" b="0" dirty="0">
+                <a:solidFill>
+                  <a:srgbClr val="CCCCCC"/>
+                </a:solidFill>
+                <a:effectLst/>
+                <a:latin typeface="Consolas" panose="020B0609020204030204" pitchFamily="49" charset="0"/>
+              </a:rPr>
+              <a:t>)</a:t>
+            </a:r>
+          </a:p>
+          <a:p>
+            <a:pPr>
+              <a:lnSpc>
+                <a:spcPct val="113095"/>
+              </a:lnSpc>
+              <a:buNone/>
+            </a:pPr>
+            <a:br>
+              <a:rPr lang="pt-BR" sz="1050" b="0" dirty="0">
+                <a:solidFill>
+                  <a:srgbClr val="CCCCCC"/>
+                </a:solidFill>
+                <a:effectLst/>
+                <a:latin typeface="Consolas" panose="020B0609020204030204" pitchFamily="49" charset="0"/>
+              </a:rPr>
+            </a:br>
+            <a:endParaRPr lang="pt-BR" sz="1050" b="0" dirty="0">
+              <a:solidFill>
+                <a:srgbClr val="CCCCCC"/>
+              </a:solidFill>
+              <a:effectLst/>
+              <a:latin typeface="Consolas" panose="020B0609020204030204" pitchFamily="49" charset="0"/>
+            </a:endParaRPr>
+          </a:p>
+          <a:p>
+            <a:pPr>
+              <a:lnSpc>
+                <a:spcPct val="113095"/>
+              </a:lnSpc>
+              <a:buNone/>
+            </a:pPr>
+            <a:r>
+              <a:rPr lang="pt-BR" sz="1050" b="0" dirty="0">
+                <a:solidFill>
+                  <a:srgbClr val="CCCCCC"/>
+                </a:solidFill>
+                <a:effectLst/>
+                <a:latin typeface="Consolas" panose="020B0609020204030204" pitchFamily="49" charset="0"/>
+              </a:rPr>
+              <a:t>                .</a:t>
+            </a:r>
+            <a:r>
+              <a:rPr lang="pt-BR" sz="1050" b="0" dirty="0" err="1">
+                <a:solidFill>
+                  <a:srgbClr val="DCDCAA"/>
+                </a:solidFill>
+                <a:effectLst/>
+                <a:latin typeface="Consolas" panose="020B0609020204030204" pitchFamily="49" charset="0"/>
+              </a:rPr>
+              <a:t>withKD</a:t>
+            </a:r>
+            <a:r>
+              <a:rPr lang="pt-BR" sz="1050" b="0" dirty="0">
+                <a:solidFill>
+                  <a:srgbClr val="CCCCCC"/>
+                </a:solidFill>
+                <a:effectLst/>
+                <a:latin typeface="Consolas" panose="020B0609020204030204" pitchFamily="49" charset="0"/>
+              </a:rPr>
+              <a:t>(</a:t>
+            </a:r>
+          </a:p>
+          <a:p>
+            <a:pPr>
+              <a:lnSpc>
+                <a:spcPct val="113095"/>
+              </a:lnSpc>
+              <a:buNone/>
+            </a:pPr>
+            <a:r>
+              <a:rPr lang="pt-BR" sz="1050" b="0" dirty="0">
+                <a:solidFill>
+                  <a:srgbClr val="CCCCCC"/>
+                </a:solidFill>
+                <a:effectLst/>
+                <a:latin typeface="Consolas" panose="020B0609020204030204" pitchFamily="49" charset="0"/>
+              </a:rPr>
+              <a:t>                </a:t>
+            </a:r>
+            <a:r>
+              <a:rPr lang="pt-BR" sz="1050" b="0" dirty="0">
+                <a:solidFill>
+                  <a:srgbClr val="B5CEA8"/>
+                </a:solidFill>
+                <a:effectLst/>
+                <a:latin typeface="Consolas" panose="020B0609020204030204" pitchFamily="49" charset="0"/>
+              </a:rPr>
+              <a:t>0.0</a:t>
+            </a:r>
+            <a:r>
+              <a:rPr lang="pt-BR" sz="1050" b="0" dirty="0">
+                <a:solidFill>
+                  <a:srgbClr val="CCCCCC"/>
+                </a:solidFill>
+                <a:effectLst/>
+                <a:latin typeface="Consolas" panose="020B0609020204030204" pitchFamily="49" charset="0"/>
+              </a:rPr>
+              <a:t>)</a:t>
+            </a:r>
+          </a:p>
+          <a:p>
+            <a:pPr>
+              <a:lnSpc>
+                <a:spcPct val="113095"/>
+              </a:lnSpc>
+              <a:buNone/>
+            </a:pPr>
+            <a:br>
+              <a:rPr lang="pt-BR" sz="1050" b="0" dirty="0">
+                <a:solidFill>
+                  <a:srgbClr val="CCCCCC"/>
+                </a:solidFill>
+                <a:effectLst/>
+                <a:latin typeface="Consolas" panose="020B0609020204030204" pitchFamily="49" charset="0"/>
+              </a:rPr>
+            </a:br>
+            <a:endParaRPr lang="pt-BR" sz="1050" b="0" dirty="0">
+              <a:solidFill>
+                <a:srgbClr val="CCCCCC"/>
+              </a:solidFill>
+              <a:effectLst/>
+              <a:latin typeface="Consolas" panose="020B0609020204030204" pitchFamily="49" charset="0"/>
+            </a:endParaRPr>
+          </a:p>
+          <a:p>
+            <a:pPr>
+              <a:lnSpc>
+                <a:spcPct val="113095"/>
+              </a:lnSpc>
+              <a:buNone/>
+            </a:pPr>
+            <a:r>
+              <a:rPr lang="pt-BR" sz="1050" b="0" dirty="0">
+                <a:solidFill>
+                  <a:srgbClr val="CCCCCC"/>
+                </a:solidFill>
+                <a:effectLst/>
+                <a:latin typeface="Consolas" panose="020B0609020204030204" pitchFamily="49" charset="0"/>
+              </a:rPr>
+              <a:t>                .</a:t>
+            </a:r>
+            <a:r>
+              <a:rPr lang="pt-BR" sz="1050" b="0" dirty="0" err="1">
+                <a:solidFill>
+                  <a:srgbClr val="DCDCAA"/>
+                </a:solidFill>
+                <a:effectLst/>
+                <a:latin typeface="Consolas" panose="020B0609020204030204" pitchFamily="49" charset="0"/>
+              </a:rPr>
+              <a:t>withKS</a:t>
+            </a:r>
+            <a:r>
+              <a:rPr lang="pt-BR" sz="1050" b="0" dirty="0">
+                <a:solidFill>
+                  <a:srgbClr val="CCCCCC"/>
+                </a:solidFill>
+                <a:effectLst/>
+                <a:latin typeface="Consolas" panose="020B0609020204030204" pitchFamily="49" charset="0"/>
+              </a:rPr>
+              <a:t>(</a:t>
+            </a:r>
+          </a:p>
+          <a:p>
+            <a:pPr>
+              <a:lnSpc>
+                <a:spcPct val="113095"/>
+              </a:lnSpc>
+              <a:buNone/>
+            </a:pPr>
+            <a:r>
+              <a:rPr lang="pt-BR" sz="1050" b="0" dirty="0">
+                <a:solidFill>
+                  <a:srgbClr val="CCCCCC"/>
+                </a:solidFill>
+                <a:effectLst/>
+                <a:latin typeface="Consolas" panose="020B0609020204030204" pitchFamily="49" charset="0"/>
+              </a:rPr>
+              <a:t>                </a:t>
+            </a:r>
+            <a:r>
+              <a:rPr lang="pt-BR" sz="1050" b="0" dirty="0">
+                <a:solidFill>
+                  <a:srgbClr val="B5CEA8"/>
+                </a:solidFill>
+                <a:effectLst/>
+                <a:latin typeface="Consolas" panose="020B0609020204030204" pitchFamily="49" charset="0"/>
+              </a:rPr>
+              <a:t>0.26</a:t>
+            </a:r>
+            <a:r>
+              <a:rPr lang="pt-BR" sz="1050" b="0" dirty="0">
+                <a:solidFill>
+                  <a:srgbClr val="CCCCCC"/>
+                </a:solidFill>
+                <a:effectLst/>
+                <a:latin typeface="Consolas" panose="020B0609020204030204" pitchFamily="49" charset="0"/>
+              </a:rPr>
+              <a:t>)</a:t>
+            </a:r>
+          </a:p>
+          <a:p>
+            <a:pPr>
+              <a:lnSpc>
+                <a:spcPct val="113095"/>
+              </a:lnSpc>
+              <a:buNone/>
+            </a:pPr>
+            <a:br>
+              <a:rPr lang="pt-BR" sz="1050" b="0" dirty="0">
+                <a:solidFill>
+                  <a:srgbClr val="CCCCCC"/>
+                </a:solidFill>
+                <a:effectLst/>
+                <a:latin typeface="Consolas" panose="020B0609020204030204" pitchFamily="49" charset="0"/>
+              </a:rPr>
+            </a:br>
+            <a:endParaRPr lang="pt-BR" sz="1050" b="0" dirty="0">
+              <a:solidFill>
+                <a:srgbClr val="CCCCCC"/>
+              </a:solidFill>
+              <a:effectLst/>
+              <a:latin typeface="Consolas" panose="020B0609020204030204" pitchFamily="49" charset="0"/>
+            </a:endParaRPr>
+          </a:p>
+          <a:p>
+            <a:pPr>
+              <a:lnSpc>
+                <a:spcPct val="113095"/>
+              </a:lnSpc>
+              <a:buNone/>
+            </a:pPr>
+            <a:r>
+              <a:rPr lang="pt-BR" sz="1050" b="0" dirty="0">
+                <a:solidFill>
+                  <a:srgbClr val="CCCCCC"/>
+                </a:solidFill>
+                <a:effectLst/>
+                <a:latin typeface="Consolas" panose="020B0609020204030204" pitchFamily="49" charset="0"/>
+              </a:rPr>
+              <a:t>                .</a:t>
+            </a:r>
+            <a:r>
+              <a:rPr lang="pt-BR" sz="1050" b="0" dirty="0" err="1">
+                <a:solidFill>
+                  <a:srgbClr val="DCDCAA"/>
+                </a:solidFill>
+                <a:effectLst/>
+                <a:latin typeface="Consolas" panose="020B0609020204030204" pitchFamily="49" charset="0"/>
+              </a:rPr>
+              <a:t>withKV</a:t>
+            </a:r>
+            <a:r>
+              <a:rPr lang="pt-BR" sz="1050" b="0" dirty="0">
+                <a:solidFill>
+                  <a:srgbClr val="CCCCCC"/>
+                </a:solidFill>
+                <a:effectLst/>
+                <a:latin typeface="Consolas" panose="020B0609020204030204" pitchFamily="49" charset="0"/>
+              </a:rPr>
+              <a:t>(</a:t>
+            </a:r>
+          </a:p>
+          <a:p>
+            <a:pPr>
+              <a:lnSpc>
+                <a:spcPct val="113095"/>
+              </a:lnSpc>
+              <a:buNone/>
+            </a:pPr>
+            <a:r>
+              <a:rPr lang="pt-BR" sz="1050" b="0" dirty="0">
+                <a:solidFill>
+                  <a:srgbClr val="CCCCCC"/>
+                </a:solidFill>
+                <a:effectLst/>
+                <a:latin typeface="Consolas" panose="020B0609020204030204" pitchFamily="49" charset="0"/>
+              </a:rPr>
+              <a:t>                </a:t>
+            </a:r>
+            <a:r>
+              <a:rPr lang="pt-BR" sz="1050" b="0" dirty="0">
+                <a:solidFill>
+                  <a:srgbClr val="B5CEA8"/>
+                </a:solidFill>
+                <a:effectLst/>
+                <a:latin typeface="Consolas" panose="020B0609020204030204" pitchFamily="49" charset="0"/>
+              </a:rPr>
+              <a:t>0.108</a:t>
+            </a:r>
+            <a:r>
+              <a:rPr lang="pt-BR" sz="1050" b="0" dirty="0">
+                <a:solidFill>
+                  <a:srgbClr val="CCCCCC"/>
+                </a:solidFill>
+                <a:effectLst/>
+                <a:latin typeface="Consolas" panose="020B0609020204030204" pitchFamily="49" charset="0"/>
+              </a:rPr>
+              <a:t>)</a:t>
+            </a:r>
+          </a:p>
+          <a:p>
+            <a:pPr>
+              <a:lnSpc>
+                <a:spcPct val="113095"/>
+              </a:lnSpc>
+              <a:buNone/>
+            </a:pPr>
+            <a:br>
+              <a:rPr lang="pt-BR" sz="1050" b="0" dirty="0">
+                <a:solidFill>
+                  <a:srgbClr val="CCCCCC"/>
+                </a:solidFill>
+                <a:effectLst/>
+                <a:latin typeface="Consolas" panose="020B0609020204030204" pitchFamily="49" charset="0"/>
+              </a:rPr>
+            </a:br>
+            <a:endParaRPr lang="pt-BR" sz="1050" b="0" dirty="0">
+              <a:solidFill>
+                <a:srgbClr val="CCCCCC"/>
+              </a:solidFill>
+              <a:effectLst/>
+              <a:latin typeface="Consolas" panose="020B0609020204030204" pitchFamily="49" charset="0"/>
+            </a:endParaRPr>
+          </a:p>
+          <a:p>
+            <a:pPr>
+              <a:lnSpc>
+                <a:spcPct val="113095"/>
+              </a:lnSpc>
+              <a:buNone/>
+            </a:pPr>
+            <a:r>
+              <a:rPr lang="pt-BR" sz="1050" b="0" dirty="0">
+                <a:solidFill>
+                  <a:srgbClr val="CCCCCC"/>
+                </a:solidFill>
+                <a:effectLst/>
+                <a:latin typeface="Consolas" panose="020B0609020204030204" pitchFamily="49" charset="0"/>
+              </a:rPr>
+              <a:t>                .</a:t>
+            </a:r>
+            <a:r>
+              <a:rPr lang="pt-BR" sz="1050" b="0" dirty="0" err="1">
+                <a:solidFill>
+                  <a:srgbClr val="DCDCAA"/>
+                </a:solidFill>
+                <a:effectLst/>
+                <a:latin typeface="Consolas" panose="020B0609020204030204" pitchFamily="49" charset="0"/>
+              </a:rPr>
+              <a:t>withKA</a:t>
+            </a:r>
+            <a:r>
+              <a:rPr lang="pt-BR" sz="1050" b="0" dirty="0">
+                <a:solidFill>
+                  <a:srgbClr val="CCCCCC"/>
+                </a:solidFill>
+                <a:effectLst/>
+                <a:latin typeface="Consolas" panose="020B0609020204030204" pitchFamily="49" charset="0"/>
+              </a:rPr>
+              <a:t>(</a:t>
+            </a:r>
+          </a:p>
+          <a:p>
+            <a:pPr>
+              <a:lnSpc>
+                <a:spcPct val="113095"/>
+              </a:lnSpc>
+              <a:buNone/>
+            </a:pPr>
+            <a:r>
+              <a:rPr lang="pt-BR" sz="1050" b="0" dirty="0">
+                <a:solidFill>
+                  <a:srgbClr val="CCCCCC"/>
+                </a:solidFill>
+                <a:effectLst/>
+                <a:latin typeface="Consolas" panose="020B0609020204030204" pitchFamily="49" charset="0"/>
+              </a:rPr>
+              <a:t>                </a:t>
+            </a:r>
+            <a:r>
+              <a:rPr lang="pt-BR" sz="1050" b="0" dirty="0">
+                <a:solidFill>
+                  <a:srgbClr val="B5CEA8"/>
+                </a:solidFill>
+                <a:effectLst/>
+                <a:latin typeface="Consolas" panose="020B0609020204030204" pitchFamily="49" charset="0"/>
+              </a:rPr>
+              <a:t>0.0</a:t>
+            </a:r>
+            <a:r>
+              <a:rPr lang="pt-BR" sz="1050" b="0" dirty="0">
+                <a:solidFill>
+                  <a:srgbClr val="CCCCCC"/>
+                </a:solidFill>
+                <a:effectLst/>
+                <a:latin typeface="Consolas" panose="020B0609020204030204" pitchFamily="49" charset="0"/>
+              </a:rPr>
+              <a:t>);</a:t>
             </a:r>
           </a:p>
         </p:txBody>
@@ -6703,7 +7492,1309 @@
     </p:spTree>
     <p:extLst>
       <p:ext uri="{BB962C8B-B14F-4D97-AF65-F5344CB8AC3E}">
-        <p14:creationId xmlns:p14="http://schemas.microsoft.com/office/powerpoint/2010/main" val="1170234007"/>
+        <p14:creationId xmlns:p14="http://schemas.microsoft.com/office/powerpoint/2010/main" val="2699926381"/>
+      </p:ext>
+    </p:extLst>
+  </p:cSld>
+  <p:clrMapOvr>
+    <a:masterClrMapping/>
+  </p:clrMapOvr>
+</p:sld>
+</file>
+
+<file path=ppt/slides/slide15.xml><?xml version="1.0" encoding="utf-8"?>
+<p:sld xmlns:a="http://schemas.openxmlformats.org/drawingml/2006/main" xmlns:r="http://schemas.openxmlformats.org/officeDocument/2006/relationships" xmlns:p="http://schemas.openxmlformats.org/presentationml/2006/main">
+  <p:cSld>
+    <p:bg>
+      <p:bgPr>
+        <a:solidFill>
+          <a:schemeClr val="bg1"/>
+        </a:solidFill>
+        <a:effectLst/>
+      </p:bgPr>
+    </p:bg>
+    <p:spTree>
+      <p:nvGrpSpPr>
+        <p:cNvPr id="1" name=""/>
+        <p:cNvGrpSpPr/>
+        <p:nvPr/>
+      </p:nvGrpSpPr>
+      <p:grpSpPr>
+        <a:xfrm>
+          <a:off x="0" y="0"/>
+          <a:ext cx="0" cy="0"/>
+          <a:chOff x="0" y="0"/>
+          <a:chExt cx="0" cy="0"/>
+        </a:xfrm>
+      </p:grpSpPr>
+      <p:sp useBgFill="1">
+        <p:nvSpPr>
+          <p:cNvPr id="9" name="Rectangle 8">
+            <a:extLst>
+              <a:ext uri="{FF2B5EF4-FFF2-40B4-BE49-F238E27FC236}">
+                <a16:creationId xmlns:a16="http://schemas.microsoft.com/office/drawing/2014/main" id="{0288C6B4-AFC3-407F-A595-EFFD38D4CCAF}"/>
+              </a:ext>
+              <a:ext uri="{C183D7F6-B498-43B3-948B-1728B52AA6E4}">
+                <adec:decorative xmlns:adec="http://schemas.microsoft.com/office/drawing/2017/decorative" val="1"/>
+              </a:ext>
+            </a:extLst>
+          </p:cNvPr>
+          <p:cNvSpPr>
+            <a:spLocks noGrp="1" noRot="1" noChangeAspect="1" noMove="1" noResize="1" noEditPoints="1" noAdjustHandles="1" noChangeArrowheads="1" noChangeShapeType="1" noTextEdit="1"/>
+          </p:cNvSpPr>
+          <p:nvPr>
+            <p:extLst>
+              <p:ext uri="{386F3935-93C4-4BCD-93E2-E3B085C9AB24}">
+                <p16:designElem xmlns:p16="http://schemas.microsoft.com/office/powerpoint/2015/main" val="1"/>
+              </p:ext>
+            </p:extLst>
+          </p:nvPr>
+        </p:nvSpPr>
+        <p:spPr>
+          <a:xfrm>
+            <a:off x="0" y="0"/>
+            <a:ext cx="12192000" cy="6858000"/>
+          </a:xfrm>
+          <a:prstGeom prst="rect">
+            <a:avLst/>
+          </a:prstGeom>
+          <a:ln>
+            <a:noFill/>
+          </a:ln>
+        </p:spPr>
+        <p:style>
+          <a:lnRef idx="2">
+            <a:schemeClr val="accent1">
+              <a:shade val="50000"/>
+            </a:schemeClr>
+          </a:lnRef>
+          <a:fillRef idx="1">
+            <a:schemeClr val="accent1"/>
+          </a:fillRef>
+          <a:effectRef idx="0">
+            <a:schemeClr val="accent1"/>
+          </a:effectRef>
+          <a:fontRef idx="minor">
+            <a:schemeClr val="lt1"/>
+          </a:fontRef>
+        </p:style>
+        <p:txBody>
+          <a:bodyPr rtlCol="0" anchor="ctr"/>
+          <a:lstStyle/>
+          <a:p>
+            <a:pPr algn="ctr"/>
+            <a:endParaRPr lang="en-US"/>
+          </a:p>
+        </p:txBody>
+      </p:sp>
+      <p:sp useBgFill="1">
+        <p:nvSpPr>
+          <p:cNvPr id="11" name="Freeform: Shape 10">
+            <a:extLst>
+              <a:ext uri="{FF2B5EF4-FFF2-40B4-BE49-F238E27FC236}">
+                <a16:creationId xmlns:a16="http://schemas.microsoft.com/office/drawing/2014/main" id="{CF236821-17FE-429B-8D2C-08E13A64EA40}"/>
+              </a:ext>
+              <a:ext uri="{C183D7F6-B498-43B3-948B-1728B52AA6E4}">
+                <adec:decorative xmlns:adec="http://schemas.microsoft.com/office/drawing/2017/decorative" val="1"/>
+              </a:ext>
+            </a:extLst>
+          </p:cNvPr>
+          <p:cNvSpPr>
+            <a:spLocks noGrp="1" noRot="1" noChangeAspect="1" noMove="1" noResize="1" noEditPoints="1" noAdjustHandles="1" noChangeArrowheads="1" noChangeShapeType="1" noTextEdit="1"/>
+          </p:cNvSpPr>
+          <p:nvPr>
+            <p:extLst>
+              <p:ext uri="{386F3935-93C4-4BCD-93E2-E3B085C9AB24}">
+                <p16:designElem xmlns:p16="http://schemas.microsoft.com/office/powerpoint/2015/main" val="1"/>
+              </p:ext>
+            </p:extLst>
+          </p:nvPr>
+        </p:nvSpPr>
+        <p:spPr>
+          <a:xfrm>
+            <a:off x="-1" y="0"/>
+            <a:ext cx="4455673" cy="6858000"/>
+          </a:xfrm>
+          <a:custGeom>
+            <a:avLst/>
+            <a:gdLst>
+              <a:gd name="connsiteX0" fmla="*/ 0 w 4455673"/>
+              <a:gd name="connsiteY0" fmla="*/ 0 h 6858000"/>
+              <a:gd name="connsiteX1" fmla="*/ 3242695 w 4455673"/>
+              <a:gd name="connsiteY1" fmla="*/ 0 h 6858000"/>
+              <a:gd name="connsiteX2" fmla="*/ 3305678 w 4455673"/>
+              <a:gd name="connsiteY2" fmla="*/ 69271 h 6858000"/>
+              <a:gd name="connsiteX3" fmla="*/ 4455673 w 4455673"/>
+              <a:gd name="connsiteY3" fmla="*/ 3429000 h 6858000"/>
+              <a:gd name="connsiteX4" fmla="*/ 3305678 w 4455673"/>
+              <a:gd name="connsiteY4" fmla="*/ 6788730 h 6858000"/>
+              <a:gd name="connsiteX5" fmla="*/ 3242695 w 4455673"/>
+              <a:gd name="connsiteY5" fmla="*/ 6858000 h 6858000"/>
+              <a:gd name="connsiteX6" fmla="*/ 0 w 4455673"/>
+              <a:gd name="connsiteY6" fmla="*/ 6858000 h 6858000"/>
+            </a:gdLst>
+            <a:ahLst/>
+            <a:cxnLst>
+              <a:cxn ang="0">
+                <a:pos x="connsiteX0" y="connsiteY0"/>
+              </a:cxn>
+              <a:cxn ang="0">
+                <a:pos x="connsiteX1" y="connsiteY1"/>
+              </a:cxn>
+              <a:cxn ang="0">
+                <a:pos x="connsiteX2" y="connsiteY2"/>
+              </a:cxn>
+              <a:cxn ang="0">
+                <a:pos x="connsiteX3" y="connsiteY3"/>
+              </a:cxn>
+              <a:cxn ang="0">
+                <a:pos x="connsiteX4" y="connsiteY4"/>
+              </a:cxn>
+              <a:cxn ang="0">
+                <a:pos x="connsiteX5" y="connsiteY5"/>
+              </a:cxn>
+              <a:cxn ang="0">
+                <a:pos x="connsiteX6" y="connsiteY6"/>
+              </a:cxn>
+            </a:cxnLst>
+            <a:rect l="l" t="t" r="r" b="b"/>
+            <a:pathLst>
+              <a:path w="4455673" h="6858000">
+                <a:moveTo>
+                  <a:pt x="0" y="0"/>
+                </a:moveTo>
+                <a:lnTo>
+                  <a:pt x="3242695" y="0"/>
+                </a:lnTo>
+                <a:lnTo>
+                  <a:pt x="3305678" y="69271"/>
+                </a:lnTo>
+                <a:cubicBezTo>
+                  <a:pt x="4016204" y="929100"/>
+                  <a:pt x="4455673" y="2116944"/>
+                  <a:pt x="4455673" y="3429000"/>
+                </a:cubicBezTo>
+                <a:cubicBezTo>
+                  <a:pt x="4455673" y="4741056"/>
+                  <a:pt x="4016204" y="5928900"/>
+                  <a:pt x="3305678" y="6788730"/>
+                </a:cubicBezTo>
+                <a:lnTo>
+                  <a:pt x="3242695" y="6858000"/>
+                </a:lnTo>
+                <a:lnTo>
+                  <a:pt x="0" y="6858000"/>
+                </a:lnTo>
+                <a:close/>
+              </a:path>
+            </a:pathLst>
+          </a:custGeom>
+          <a:ln w="9525">
+            <a:solidFill>
+              <a:srgbClr val="EFEFEF"/>
+            </a:solidFill>
+          </a:ln>
+          <a:effectLst>
+            <a:outerShdw blurRad="88900" dist="38100" algn="l" rotWithShape="0">
+              <a:schemeClr val="bg1">
+                <a:lumMod val="85000"/>
+                <a:alpha val="50000"/>
+              </a:schemeClr>
+            </a:outerShdw>
+          </a:effectLst>
+        </p:spPr>
+        <p:style>
+          <a:lnRef idx="2">
+            <a:schemeClr val="accent1">
+              <a:shade val="50000"/>
+            </a:schemeClr>
+          </a:lnRef>
+          <a:fillRef idx="1">
+            <a:schemeClr val="accent1"/>
+          </a:fillRef>
+          <a:effectRef idx="0">
+            <a:schemeClr val="accent1"/>
+          </a:effectRef>
+          <a:fontRef idx="minor">
+            <a:schemeClr val="lt1"/>
+          </a:fontRef>
+        </p:style>
+        <p:txBody>
+          <a:bodyPr wrap="square" rtlCol="0" anchor="ctr">
+            <a:noAutofit/>
+          </a:bodyPr>
+          <a:lstStyle/>
+          <a:p>
+            <a:pPr marL="0" marR="0" lvl="0" indent="0" algn="ctr" defTabSz="914400" rtl="0" eaLnBrk="1" fontAlgn="auto" latinLnBrk="0" hangingPunct="1">
+              <a:lnSpc>
+                <a:spcPct val="100000"/>
+              </a:lnSpc>
+              <a:spcBef>
+                <a:spcPts val="0"/>
+              </a:spcBef>
+              <a:spcAft>
+                <a:spcPts val="0"/>
+              </a:spcAft>
+              <a:buClrTx/>
+              <a:buSzTx/>
+              <a:buFontTx/>
+              <a:buNone/>
+              <a:tabLst/>
+              <a:defRPr/>
+            </a:pPr>
+            <a:endParaRPr kumimoji="0" lang="en-US" sz="1800" b="0" i="0" u="none" strike="noStrike" kern="1200" cap="none" spc="0" normalizeH="0" baseline="0" noProof="0">
+              <a:ln>
+                <a:noFill/>
+              </a:ln>
+              <a:solidFill>
+                <a:prstClr val="white"/>
+              </a:solidFill>
+              <a:effectLst/>
+              <a:uLnTx/>
+              <a:uFillTx/>
+              <a:latin typeface="Calibri" panose="020F0502020204030204"/>
+              <a:ea typeface="+mn-ea"/>
+              <a:cs typeface="+mn-cs"/>
+            </a:endParaRPr>
+          </a:p>
+        </p:txBody>
+      </p:sp>
+      <p:sp useBgFill="1">
+        <p:nvSpPr>
+          <p:cNvPr id="13" name="Freeform: Shape 12">
+            <a:extLst>
+              <a:ext uri="{FF2B5EF4-FFF2-40B4-BE49-F238E27FC236}">
+                <a16:creationId xmlns:a16="http://schemas.microsoft.com/office/drawing/2014/main" id="{C0BDBCD2-E081-43AB-9119-C55465E59757}"/>
+              </a:ext>
+              <a:ext uri="{C183D7F6-B498-43B3-948B-1728B52AA6E4}">
+                <adec:decorative xmlns:adec="http://schemas.microsoft.com/office/drawing/2017/decorative" val="1"/>
+              </a:ext>
+            </a:extLst>
+          </p:cNvPr>
+          <p:cNvSpPr>
+            <a:spLocks noGrp="1" noRot="1" noChangeAspect="1" noMove="1" noResize="1" noEditPoints="1" noAdjustHandles="1" noChangeArrowheads="1" noChangeShapeType="1" noTextEdit="1"/>
+          </p:cNvSpPr>
+          <p:nvPr>
+            <p:extLst>
+              <p:ext uri="{386F3935-93C4-4BCD-93E2-E3B085C9AB24}">
+                <p16:designElem xmlns:p16="http://schemas.microsoft.com/office/powerpoint/2015/main" val="1"/>
+              </p:ext>
+            </p:extLst>
+          </p:nvPr>
+        </p:nvSpPr>
+        <p:spPr>
+          <a:xfrm>
+            <a:off x="0" y="0"/>
+            <a:ext cx="4446529" cy="6858000"/>
+          </a:xfrm>
+          <a:custGeom>
+            <a:avLst/>
+            <a:gdLst>
+              <a:gd name="connsiteX0" fmla="*/ 0 w 4446529"/>
+              <a:gd name="connsiteY0" fmla="*/ 0 h 6858000"/>
+              <a:gd name="connsiteX1" fmla="*/ 3233551 w 4446529"/>
+              <a:gd name="connsiteY1" fmla="*/ 0 h 6858000"/>
+              <a:gd name="connsiteX2" fmla="*/ 3296534 w 4446529"/>
+              <a:gd name="connsiteY2" fmla="*/ 69271 h 6858000"/>
+              <a:gd name="connsiteX3" fmla="*/ 4446529 w 4446529"/>
+              <a:gd name="connsiteY3" fmla="*/ 3429000 h 6858000"/>
+              <a:gd name="connsiteX4" fmla="*/ 3296534 w 4446529"/>
+              <a:gd name="connsiteY4" fmla="*/ 6788730 h 6858000"/>
+              <a:gd name="connsiteX5" fmla="*/ 3233551 w 4446529"/>
+              <a:gd name="connsiteY5" fmla="*/ 6858000 h 6858000"/>
+              <a:gd name="connsiteX6" fmla="*/ 0 w 4446529"/>
+              <a:gd name="connsiteY6" fmla="*/ 6858000 h 6858000"/>
+            </a:gdLst>
+            <a:ahLst/>
+            <a:cxnLst>
+              <a:cxn ang="0">
+                <a:pos x="connsiteX0" y="connsiteY0"/>
+              </a:cxn>
+              <a:cxn ang="0">
+                <a:pos x="connsiteX1" y="connsiteY1"/>
+              </a:cxn>
+              <a:cxn ang="0">
+                <a:pos x="connsiteX2" y="connsiteY2"/>
+              </a:cxn>
+              <a:cxn ang="0">
+                <a:pos x="connsiteX3" y="connsiteY3"/>
+              </a:cxn>
+              <a:cxn ang="0">
+                <a:pos x="connsiteX4" y="connsiteY4"/>
+              </a:cxn>
+              <a:cxn ang="0">
+                <a:pos x="connsiteX5" y="connsiteY5"/>
+              </a:cxn>
+              <a:cxn ang="0">
+                <a:pos x="connsiteX6" y="connsiteY6"/>
+              </a:cxn>
+            </a:cxnLst>
+            <a:rect l="l" t="t" r="r" b="b"/>
+            <a:pathLst>
+              <a:path w="4446529" h="6858000">
+                <a:moveTo>
+                  <a:pt x="0" y="0"/>
+                </a:moveTo>
+                <a:lnTo>
+                  <a:pt x="3233551" y="0"/>
+                </a:lnTo>
+                <a:lnTo>
+                  <a:pt x="3296534" y="69271"/>
+                </a:lnTo>
+                <a:cubicBezTo>
+                  <a:pt x="4007060" y="929100"/>
+                  <a:pt x="4446529" y="2116944"/>
+                  <a:pt x="4446529" y="3429000"/>
+                </a:cubicBezTo>
+                <a:cubicBezTo>
+                  <a:pt x="4446529" y="4741056"/>
+                  <a:pt x="4007060" y="5928900"/>
+                  <a:pt x="3296534" y="6788730"/>
+                </a:cubicBezTo>
+                <a:lnTo>
+                  <a:pt x="3233551" y="6858000"/>
+                </a:lnTo>
+                <a:lnTo>
+                  <a:pt x="0" y="6858000"/>
+                </a:lnTo>
+                <a:close/>
+              </a:path>
+            </a:pathLst>
+          </a:custGeom>
+          <a:ln w="9525">
+            <a:noFill/>
+          </a:ln>
+          <a:effectLst/>
+        </p:spPr>
+        <p:style>
+          <a:lnRef idx="2">
+            <a:schemeClr val="accent1">
+              <a:shade val="50000"/>
+            </a:schemeClr>
+          </a:lnRef>
+          <a:fillRef idx="1">
+            <a:schemeClr val="accent1"/>
+          </a:fillRef>
+          <a:effectRef idx="0">
+            <a:schemeClr val="accent1"/>
+          </a:effectRef>
+          <a:fontRef idx="minor">
+            <a:schemeClr val="lt1"/>
+          </a:fontRef>
+        </p:style>
+        <p:txBody>
+          <a:bodyPr wrap="square" rtlCol="0" anchor="ctr">
+            <a:noAutofit/>
+          </a:bodyPr>
+          <a:lstStyle/>
+          <a:p>
+            <a:pPr marL="0" marR="0" lvl="0" indent="0" algn="ctr" defTabSz="914400" rtl="0" eaLnBrk="1" fontAlgn="auto" latinLnBrk="0" hangingPunct="1">
+              <a:lnSpc>
+                <a:spcPct val="100000"/>
+              </a:lnSpc>
+              <a:spcBef>
+                <a:spcPts val="0"/>
+              </a:spcBef>
+              <a:spcAft>
+                <a:spcPts val="0"/>
+              </a:spcAft>
+              <a:buClrTx/>
+              <a:buSzTx/>
+              <a:buFontTx/>
+              <a:buNone/>
+              <a:tabLst/>
+              <a:defRPr/>
+            </a:pPr>
+            <a:endParaRPr kumimoji="0" lang="en-US" sz="1800" b="0" i="0" u="none" strike="noStrike" kern="1200" cap="none" spc="0" normalizeH="0" baseline="0" noProof="0">
+              <a:ln>
+                <a:noFill/>
+              </a:ln>
+              <a:solidFill>
+                <a:prstClr val="white"/>
+              </a:solidFill>
+              <a:effectLst/>
+              <a:uLnTx/>
+              <a:uFillTx/>
+              <a:latin typeface="Calibri" panose="020F0502020204030204"/>
+              <a:ea typeface="+mn-ea"/>
+              <a:cs typeface="+mn-cs"/>
+            </a:endParaRPr>
+          </a:p>
+        </p:txBody>
+      </p:sp>
+      <p:sp>
+        <p:nvSpPr>
+          <p:cNvPr id="15" name="Rectangle 14">
+            <a:extLst>
+              <a:ext uri="{FF2B5EF4-FFF2-40B4-BE49-F238E27FC236}">
+                <a16:creationId xmlns:a16="http://schemas.microsoft.com/office/drawing/2014/main" id="{98E79BE4-34FE-485A-98A5-92CE8F7C4743}"/>
+              </a:ext>
+              <a:ext uri="{C183D7F6-B498-43B3-948B-1728B52AA6E4}">
+                <adec:decorative xmlns:adec="http://schemas.microsoft.com/office/drawing/2017/decorative" val="1"/>
+              </a:ext>
+            </a:extLst>
+          </p:cNvPr>
+          <p:cNvSpPr>
+            <a:spLocks noGrp="1" noRot="1" noChangeAspect="1" noMove="1" noResize="1" noEditPoints="1" noAdjustHandles="1" noChangeArrowheads="1" noChangeShapeType="1" noTextEdit="1"/>
+          </p:cNvSpPr>
+          <p:nvPr>
+            <p:extLst>
+              <p:ext uri="{386F3935-93C4-4BCD-93E2-E3B085C9AB24}">
+                <p16:designElem xmlns:p16="http://schemas.microsoft.com/office/powerpoint/2015/main" val="1"/>
+              </p:ext>
+            </p:extLst>
+          </p:nvPr>
+        </p:nvSpPr>
+        <p:spPr>
+          <a:xfrm>
+            <a:off x="0" y="1426546"/>
+            <a:ext cx="128016" cy="653903"/>
+          </a:xfrm>
+          <a:prstGeom prst="rect">
+            <a:avLst/>
+          </a:prstGeom>
+          <a:solidFill>
+            <a:schemeClr val="accent2"/>
+          </a:solidFill>
+          <a:ln>
+            <a:noFill/>
+          </a:ln>
+        </p:spPr>
+        <p:style>
+          <a:lnRef idx="2">
+            <a:schemeClr val="accent1">
+              <a:shade val="50000"/>
+            </a:schemeClr>
+          </a:lnRef>
+          <a:fillRef idx="1">
+            <a:schemeClr val="accent1"/>
+          </a:fillRef>
+          <a:effectRef idx="0">
+            <a:schemeClr val="accent1"/>
+          </a:effectRef>
+          <a:fontRef idx="minor">
+            <a:schemeClr val="lt1"/>
+          </a:fontRef>
+        </p:style>
+        <p:txBody>
+          <a:bodyPr rtlCol="0" anchor="ctr"/>
+          <a:lstStyle/>
+          <a:p>
+            <a:pPr algn="ctr"/>
+            <a:endParaRPr lang="en-US">
+              <a:solidFill>
+                <a:prstClr val="white"/>
+              </a:solidFill>
+              <a:latin typeface="Calibri" panose="020F0502020204030204"/>
+            </a:endParaRPr>
+          </a:p>
+        </p:txBody>
+      </p:sp>
+      <p:sp>
+        <p:nvSpPr>
+          <p:cNvPr id="17" name="Rectangle 16">
+            <a:extLst>
+              <a:ext uri="{FF2B5EF4-FFF2-40B4-BE49-F238E27FC236}">
+                <a16:creationId xmlns:a16="http://schemas.microsoft.com/office/drawing/2014/main" id="{7A5F0580-5EE9-419F-96EE-B6529EF6E7D0}"/>
+              </a:ext>
+              <a:ext uri="{C183D7F6-B498-43B3-948B-1728B52AA6E4}">
+                <adec:decorative xmlns:adec="http://schemas.microsoft.com/office/drawing/2017/decorative" val="1"/>
+              </a:ext>
+            </a:extLst>
+          </p:cNvPr>
+          <p:cNvSpPr>
+            <a:spLocks noGrp="1" noRot="1" noChangeAspect="1" noMove="1" noResize="1" noEditPoints="1" noAdjustHandles="1" noChangeArrowheads="1" noChangeShapeType="1" noTextEdit="1"/>
+          </p:cNvSpPr>
+          <p:nvPr>
+            <p:extLst>
+              <p:ext uri="{386F3935-93C4-4BCD-93E2-E3B085C9AB24}">
+                <p16:designElem xmlns:p16="http://schemas.microsoft.com/office/powerpoint/2015/main" val="1"/>
+              </p:ext>
+            </p:extLst>
+          </p:nvPr>
+        </p:nvSpPr>
+        <p:spPr>
+          <a:xfrm>
+            <a:off x="395893" y="2443480"/>
+            <a:ext cx="3383280" cy="18288"/>
+          </a:xfrm>
+          <a:prstGeom prst="rect">
+            <a:avLst/>
+          </a:prstGeom>
+          <a:solidFill>
+            <a:srgbClr val="D5D5D5"/>
+          </a:solidFill>
+          <a:ln w="3175">
+            <a:noFill/>
+          </a:ln>
+          <a:effectLst/>
+        </p:spPr>
+        <p:style>
+          <a:lnRef idx="2">
+            <a:schemeClr val="accent1">
+              <a:shade val="50000"/>
+            </a:schemeClr>
+          </a:lnRef>
+          <a:fillRef idx="1">
+            <a:schemeClr val="accent1"/>
+          </a:fillRef>
+          <a:effectRef idx="0">
+            <a:schemeClr val="accent1"/>
+          </a:effectRef>
+          <a:fontRef idx="minor">
+            <a:schemeClr val="lt1"/>
+          </a:fontRef>
+        </p:style>
+        <p:txBody>
+          <a:bodyPr rtlCol="0" anchor="ctr"/>
+          <a:lstStyle/>
+          <a:p>
+            <a:pPr marL="0" marR="0" lvl="0" indent="0" algn="ctr" defTabSz="914400" rtl="0" eaLnBrk="1" fontAlgn="auto" latinLnBrk="0" hangingPunct="1">
+              <a:lnSpc>
+                <a:spcPct val="100000"/>
+              </a:lnSpc>
+              <a:spcBef>
+                <a:spcPts val="0"/>
+              </a:spcBef>
+              <a:spcAft>
+                <a:spcPts val="0"/>
+              </a:spcAft>
+              <a:buClrTx/>
+              <a:buSzTx/>
+              <a:buFontTx/>
+              <a:buNone/>
+              <a:tabLst/>
+              <a:defRPr/>
+            </a:pPr>
+            <a:endParaRPr kumimoji="0" lang="en-US" sz="1800" b="0" i="0" u="none" strike="noStrike" kern="1200" cap="none" spc="0" normalizeH="0" baseline="0" noProof="0">
+              <a:ln>
+                <a:noFill/>
+              </a:ln>
+              <a:solidFill>
+                <a:prstClr val="white"/>
+              </a:solidFill>
+              <a:effectLst/>
+              <a:uLnTx/>
+              <a:uFillTx/>
+              <a:latin typeface="Calibri" panose="020F0502020204030204"/>
+              <a:ea typeface="+mn-ea"/>
+              <a:cs typeface="+mn-cs"/>
+            </a:endParaRPr>
+          </a:p>
+        </p:txBody>
+      </p:sp>
+      <p:sp>
+        <p:nvSpPr>
+          <p:cNvPr id="4" name="CaixaDeTexto 3">
+            <a:extLst>
+              <a:ext uri="{FF2B5EF4-FFF2-40B4-BE49-F238E27FC236}">
+                <a16:creationId xmlns:a16="http://schemas.microsoft.com/office/drawing/2014/main" id="{D3A9B5DF-E33B-FE3A-6DEB-0767E9E16DAF}"/>
+              </a:ext>
+            </a:extLst>
+          </p:cNvPr>
+          <p:cNvSpPr txBox="1"/>
+          <p:nvPr/>
+        </p:nvSpPr>
+        <p:spPr>
+          <a:xfrm>
+            <a:off x="371094" y="2718054"/>
+            <a:ext cx="3438906" cy="3207258"/>
+          </a:xfrm>
+          <a:prstGeom prst="rect">
+            <a:avLst/>
+          </a:prstGeom>
+        </p:spPr>
+        <p:txBody>
+          <a:bodyPr vert="horz" lIns="91440" tIns="45720" rIns="91440" bIns="45720" rtlCol="0">
+            <a:normAutofit/>
+          </a:bodyPr>
+          <a:lstStyle/>
+          <a:p>
+            <a:pPr indent="-228600">
+              <a:lnSpc>
+                <a:spcPct val="90000"/>
+              </a:lnSpc>
+              <a:spcAft>
+                <a:spcPts val="600"/>
+              </a:spcAft>
+              <a:buFont typeface="Arial" panose="020B0604020202020204" pitchFamily="34" charset="0"/>
+              <a:buChar char="•"/>
+            </a:pPr>
+            <a:r>
+              <a:rPr lang="en-US" sz="1700"/>
+              <a:t>Agora fechamos os quatro módulos com um conjunto bem consistente:</a:t>
+            </a:r>
+          </a:p>
+        </p:txBody>
+      </p:sp>
+      <p:graphicFrame>
+        <p:nvGraphicFramePr>
+          <p:cNvPr id="2" name="Tabela 1">
+            <a:extLst>
+              <a:ext uri="{FF2B5EF4-FFF2-40B4-BE49-F238E27FC236}">
+                <a16:creationId xmlns:a16="http://schemas.microsoft.com/office/drawing/2014/main" id="{B3877C34-7E6C-A7E0-7575-9C046E7FD088}"/>
+              </a:ext>
+            </a:extLst>
+          </p:cNvPr>
+          <p:cNvGraphicFramePr>
+            <a:graphicFrameLocks noGrp="1"/>
+          </p:cNvGraphicFramePr>
+          <p:nvPr>
+            <p:extLst>
+              <p:ext uri="{D42A27DB-BD31-4B8C-83A1-F6EECF244321}">
+                <p14:modId xmlns:p14="http://schemas.microsoft.com/office/powerpoint/2010/main" val="2860296435"/>
+              </p:ext>
+            </p:extLst>
+          </p:nvPr>
+        </p:nvGraphicFramePr>
+        <p:xfrm>
+          <a:off x="4901184" y="2225305"/>
+          <a:ext cx="6922011" cy="2507977"/>
+        </p:xfrm>
+        <a:graphic>
+          <a:graphicData uri="http://schemas.openxmlformats.org/drawingml/2006/table">
+            <a:tbl>
+              <a:tblPr firstRow="1" bandRow="1">
+                <a:tableStyleId>{5C22544A-7EE6-4342-B048-85BDC9FD1C3A}</a:tableStyleId>
+              </a:tblPr>
+              <a:tblGrid>
+                <a:gridCol w="986470">
+                  <a:extLst>
+                    <a:ext uri="{9D8B030D-6E8A-4147-A177-3AD203B41FA5}">
+                      <a16:colId xmlns:a16="http://schemas.microsoft.com/office/drawing/2014/main" val="305712740"/>
+                    </a:ext>
+                  </a:extLst>
+                </a:gridCol>
+                <a:gridCol w="1251201">
+                  <a:extLst>
+                    <a:ext uri="{9D8B030D-6E8A-4147-A177-3AD203B41FA5}">
+                      <a16:colId xmlns:a16="http://schemas.microsoft.com/office/drawing/2014/main" val="3901160340"/>
+                    </a:ext>
+                  </a:extLst>
+                </a:gridCol>
+                <a:gridCol w="1111869">
+                  <a:extLst>
+                    <a:ext uri="{9D8B030D-6E8A-4147-A177-3AD203B41FA5}">
+                      <a16:colId xmlns:a16="http://schemas.microsoft.com/office/drawing/2014/main" val="3356371593"/>
+                    </a:ext>
+                  </a:extLst>
+                </a:gridCol>
+                <a:gridCol w="1251201">
+                  <a:extLst>
+                    <a:ext uri="{9D8B030D-6E8A-4147-A177-3AD203B41FA5}">
+                      <a16:colId xmlns:a16="http://schemas.microsoft.com/office/drawing/2014/main" val="1246572903"/>
+                    </a:ext>
+                  </a:extLst>
+                </a:gridCol>
+                <a:gridCol w="1111869">
+                  <a:extLst>
+                    <a:ext uri="{9D8B030D-6E8A-4147-A177-3AD203B41FA5}">
+                      <a16:colId xmlns:a16="http://schemas.microsoft.com/office/drawing/2014/main" val="2983193081"/>
+                    </a:ext>
+                  </a:extLst>
+                </a:gridCol>
+                <a:gridCol w="1209401">
+                  <a:extLst>
+                    <a:ext uri="{9D8B030D-6E8A-4147-A177-3AD203B41FA5}">
+                      <a16:colId xmlns:a16="http://schemas.microsoft.com/office/drawing/2014/main" val="2095669877"/>
+                    </a:ext>
+                  </a:extLst>
+                </a:gridCol>
+              </a:tblGrid>
+              <a:tr h="742361">
+                <a:tc>
+                  <a:txBody>
+                    <a:bodyPr/>
+                    <a:lstStyle/>
+                    <a:p>
+                      <a:pPr>
+                        <a:buNone/>
+                      </a:pPr>
+                      <a:r>
+                        <a:rPr lang="pt-BR" sz="2000"/>
+                        <a:t>Motor</a:t>
+                      </a:r>
+                    </a:p>
+                  </a:txBody>
+                  <a:tcPr marL="100319" marR="100319" marT="50159" marB="50159" anchor="ctr"/>
+                </a:tc>
+                <a:tc>
+                  <a:txBody>
+                    <a:bodyPr/>
+                    <a:lstStyle/>
+                    <a:p>
+                      <a:pPr>
+                        <a:buNone/>
+                      </a:pPr>
+                      <a:r>
+                        <a:rPr lang="pt-BR" sz="2000"/>
+                        <a:t>kS</a:t>
+                      </a:r>
+                    </a:p>
+                  </a:txBody>
+                  <a:tcPr marL="100319" marR="100319" marT="50159" marB="50159" anchor="ctr"/>
+                </a:tc>
+                <a:tc>
+                  <a:txBody>
+                    <a:bodyPr/>
+                    <a:lstStyle/>
+                    <a:p>
+                      <a:pPr>
+                        <a:buNone/>
+                      </a:pPr>
+                      <a:r>
+                        <a:rPr lang="pt-BR" sz="2000"/>
+                        <a:t>kV</a:t>
+                      </a:r>
+                    </a:p>
+                  </a:txBody>
+                  <a:tcPr marL="100319" marR="100319" marT="50159" marB="50159" anchor="ctr"/>
+                </a:tc>
+                <a:tc>
+                  <a:txBody>
+                    <a:bodyPr/>
+                    <a:lstStyle/>
+                    <a:p>
+                      <a:pPr>
+                        <a:buNone/>
+                      </a:pPr>
+                      <a:r>
+                        <a:rPr lang="pt-BR" sz="2000"/>
+                        <a:t>kA</a:t>
+                      </a:r>
+                    </a:p>
+                  </a:txBody>
+                  <a:tcPr marL="100319" marR="100319" marT="50159" marB="50159" anchor="ctr"/>
+                </a:tc>
+                <a:tc>
+                  <a:txBody>
+                    <a:bodyPr/>
+                    <a:lstStyle/>
+                    <a:p>
+                      <a:pPr>
+                        <a:buNone/>
+                      </a:pPr>
+                      <a:r>
+                        <a:rPr lang="pt-BR" sz="2000"/>
+                        <a:t>Accel. R²</a:t>
+                      </a:r>
+                    </a:p>
+                  </a:txBody>
+                  <a:tcPr marL="100319" marR="100319" marT="50159" marB="50159" anchor="ctr"/>
+                </a:tc>
+                <a:tc>
+                  <a:txBody>
+                    <a:bodyPr/>
+                    <a:lstStyle/>
+                    <a:p>
+                      <a:pPr>
+                        <a:buNone/>
+                      </a:pPr>
+                      <a:r>
+                        <a:rPr lang="pt-BR" sz="2000"/>
+                        <a:t>Sim Vel R²</a:t>
+                      </a:r>
+                    </a:p>
+                  </a:txBody>
+                  <a:tcPr marL="100319" marR="100319" marT="50159" marB="50159" anchor="ctr"/>
+                </a:tc>
+                <a:extLst>
+                  <a:ext uri="{0D108BD9-81ED-4DB2-BD59-A6C34878D82A}">
+                    <a16:rowId xmlns:a16="http://schemas.microsoft.com/office/drawing/2014/main" val="172186243"/>
+                  </a:ext>
+                </a:extLst>
+              </a:tr>
+              <a:tr h="441404">
+                <a:tc>
+                  <a:txBody>
+                    <a:bodyPr/>
+                    <a:lstStyle/>
+                    <a:p>
+                      <a:pPr>
+                        <a:buNone/>
+                      </a:pPr>
+                      <a:r>
+                        <a:rPr lang="pt-BR" sz="2000"/>
+                        <a:t>ID 13</a:t>
+                      </a:r>
+                    </a:p>
+                  </a:txBody>
+                  <a:tcPr marL="100319" marR="100319" marT="50159" marB="50159" anchor="ctr"/>
+                </a:tc>
+                <a:tc>
+                  <a:txBody>
+                    <a:bodyPr/>
+                    <a:lstStyle/>
+                    <a:p>
+                      <a:pPr>
+                        <a:buNone/>
+                      </a:pPr>
+                      <a:r>
+                        <a:rPr lang="pt-BR" sz="2000"/>
+                        <a:t>0,26566</a:t>
+                      </a:r>
+                    </a:p>
+                  </a:txBody>
+                  <a:tcPr marL="100319" marR="100319" marT="50159" marB="50159" anchor="ctr"/>
+                </a:tc>
+                <a:tc>
+                  <a:txBody>
+                    <a:bodyPr/>
+                    <a:lstStyle/>
+                    <a:p>
+                      <a:pPr>
+                        <a:buNone/>
+                      </a:pPr>
+                      <a:r>
+                        <a:rPr lang="pt-BR" sz="2000"/>
+                        <a:t>2,2868</a:t>
+                      </a:r>
+                    </a:p>
+                  </a:txBody>
+                  <a:tcPr marL="100319" marR="100319" marT="50159" marB="50159" anchor="ctr"/>
+                </a:tc>
+                <a:tc>
+                  <a:txBody>
+                    <a:bodyPr/>
+                    <a:lstStyle/>
+                    <a:p>
+                      <a:pPr>
+                        <a:buNone/>
+                      </a:pPr>
+                      <a:r>
+                        <a:rPr lang="pt-BR" sz="2000"/>
+                        <a:t>0,03596</a:t>
+                      </a:r>
+                    </a:p>
+                  </a:txBody>
+                  <a:tcPr marL="100319" marR="100319" marT="50159" marB="50159" anchor="ctr"/>
+                </a:tc>
+                <a:tc>
+                  <a:txBody>
+                    <a:bodyPr/>
+                    <a:lstStyle/>
+                    <a:p>
+                      <a:pPr>
+                        <a:buNone/>
+                      </a:pPr>
+                      <a:r>
+                        <a:rPr lang="pt-BR" sz="2000"/>
+                        <a:t>0,8039</a:t>
+                      </a:r>
+                    </a:p>
+                  </a:txBody>
+                  <a:tcPr marL="100319" marR="100319" marT="50159" marB="50159" anchor="ctr"/>
+                </a:tc>
+                <a:tc>
+                  <a:txBody>
+                    <a:bodyPr/>
+                    <a:lstStyle/>
+                    <a:p>
+                      <a:pPr>
+                        <a:buNone/>
+                      </a:pPr>
+                      <a:r>
+                        <a:rPr lang="pt-BR" sz="2000"/>
+                        <a:t>0,9731</a:t>
+                      </a:r>
+                    </a:p>
+                  </a:txBody>
+                  <a:tcPr marL="100319" marR="100319" marT="50159" marB="50159" anchor="ctr"/>
+                </a:tc>
+                <a:extLst>
+                  <a:ext uri="{0D108BD9-81ED-4DB2-BD59-A6C34878D82A}">
+                    <a16:rowId xmlns:a16="http://schemas.microsoft.com/office/drawing/2014/main" val="592553706"/>
+                  </a:ext>
+                </a:extLst>
+              </a:tr>
+              <a:tr h="441404">
+                <a:tc>
+                  <a:txBody>
+                    <a:bodyPr/>
+                    <a:lstStyle/>
+                    <a:p>
+                      <a:pPr>
+                        <a:buNone/>
+                      </a:pPr>
+                      <a:r>
+                        <a:rPr lang="pt-BR" sz="2000"/>
+                        <a:t>ID 14</a:t>
+                      </a:r>
+                    </a:p>
+                  </a:txBody>
+                  <a:tcPr marL="100319" marR="100319" marT="50159" marB="50159" anchor="ctr"/>
+                </a:tc>
+                <a:tc>
+                  <a:txBody>
+                    <a:bodyPr/>
+                    <a:lstStyle/>
+                    <a:p>
+                      <a:pPr>
+                        <a:buNone/>
+                      </a:pPr>
+                      <a:r>
+                        <a:rPr lang="pt-BR" sz="2000"/>
+                        <a:t>0,26029</a:t>
+                      </a:r>
+                    </a:p>
+                  </a:txBody>
+                  <a:tcPr marL="100319" marR="100319" marT="50159" marB="50159" anchor="ctr"/>
+                </a:tc>
+                <a:tc>
+                  <a:txBody>
+                    <a:bodyPr/>
+                    <a:lstStyle/>
+                    <a:p>
+                      <a:pPr>
+                        <a:buNone/>
+                      </a:pPr>
+                      <a:r>
+                        <a:rPr lang="pt-BR" sz="2000"/>
+                        <a:t>2,3215</a:t>
+                      </a:r>
+                    </a:p>
+                  </a:txBody>
+                  <a:tcPr marL="100319" marR="100319" marT="50159" marB="50159" anchor="ctr"/>
+                </a:tc>
+                <a:tc>
+                  <a:txBody>
+                    <a:bodyPr/>
+                    <a:lstStyle/>
+                    <a:p>
+                      <a:pPr>
+                        <a:buNone/>
+                      </a:pPr>
+                      <a:r>
+                        <a:rPr lang="pt-BR" sz="2000"/>
+                        <a:t>0,04110</a:t>
+                      </a:r>
+                    </a:p>
+                  </a:txBody>
+                  <a:tcPr marL="100319" marR="100319" marT="50159" marB="50159" anchor="ctr"/>
+                </a:tc>
+                <a:tc>
+                  <a:txBody>
+                    <a:bodyPr/>
+                    <a:lstStyle/>
+                    <a:p>
+                      <a:pPr>
+                        <a:buNone/>
+                      </a:pPr>
+                      <a:r>
+                        <a:rPr lang="pt-BR" sz="2000"/>
+                        <a:t>0,7758</a:t>
+                      </a:r>
+                    </a:p>
+                  </a:txBody>
+                  <a:tcPr marL="100319" marR="100319" marT="50159" marB="50159" anchor="ctr"/>
+                </a:tc>
+                <a:tc>
+                  <a:txBody>
+                    <a:bodyPr/>
+                    <a:lstStyle/>
+                    <a:p>
+                      <a:pPr>
+                        <a:buNone/>
+                      </a:pPr>
+                      <a:r>
+                        <a:rPr lang="pt-BR" sz="2000"/>
+                        <a:t>0,9723</a:t>
+                      </a:r>
+                    </a:p>
+                  </a:txBody>
+                  <a:tcPr marL="100319" marR="100319" marT="50159" marB="50159" anchor="ctr"/>
+                </a:tc>
+                <a:extLst>
+                  <a:ext uri="{0D108BD9-81ED-4DB2-BD59-A6C34878D82A}">
+                    <a16:rowId xmlns:a16="http://schemas.microsoft.com/office/drawing/2014/main" val="1371732908"/>
+                  </a:ext>
+                </a:extLst>
+              </a:tr>
+              <a:tr h="441404">
+                <a:tc>
+                  <a:txBody>
+                    <a:bodyPr/>
+                    <a:lstStyle/>
+                    <a:p>
+                      <a:pPr>
+                        <a:buNone/>
+                      </a:pPr>
+                      <a:r>
+                        <a:rPr lang="pt-BR" sz="2000"/>
+                        <a:t>ID 17</a:t>
+                      </a:r>
+                    </a:p>
+                  </a:txBody>
+                  <a:tcPr marL="100319" marR="100319" marT="50159" marB="50159" anchor="ctr"/>
+                </a:tc>
+                <a:tc>
+                  <a:txBody>
+                    <a:bodyPr/>
+                    <a:lstStyle/>
+                    <a:p>
+                      <a:pPr>
+                        <a:buNone/>
+                      </a:pPr>
+                      <a:r>
+                        <a:rPr lang="pt-BR" sz="2000"/>
+                        <a:t>0,25631</a:t>
+                      </a:r>
+                    </a:p>
+                  </a:txBody>
+                  <a:tcPr marL="100319" marR="100319" marT="50159" marB="50159" anchor="ctr"/>
+                </a:tc>
+                <a:tc>
+                  <a:txBody>
+                    <a:bodyPr/>
+                    <a:lstStyle/>
+                    <a:p>
+                      <a:pPr>
+                        <a:buNone/>
+                      </a:pPr>
+                      <a:r>
+                        <a:rPr lang="pt-BR" sz="2000"/>
+                        <a:t>2,2698</a:t>
+                      </a:r>
+                    </a:p>
+                  </a:txBody>
+                  <a:tcPr marL="100319" marR="100319" marT="50159" marB="50159" anchor="ctr"/>
+                </a:tc>
+                <a:tc>
+                  <a:txBody>
+                    <a:bodyPr/>
+                    <a:lstStyle/>
+                    <a:p>
+                      <a:pPr>
+                        <a:buNone/>
+                      </a:pPr>
+                      <a:r>
+                        <a:rPr lang="pt-BR" sz="2000"/>
+                        <a:t>0,03989</a:t>
+                      </a:r>
+                    </a:p>
+                  </a:txBody>
+                  <a:tcPr marL="100319" marR="100319" marT="50159" marB="50159" anchor="ctr"/>
+                </a:tc>
+                <a:tc>
+                  <a:txBody>
+                    <a:bodyPr/>
+                    <a:lstStyle/>
+                    <a:p>
+                      <a:pPr>
+                        <a:buNone/>
+                      </a:pPr>
+                      <a:r>
+                        <a:rPr lang="pt-BR" sz="2000"/>
+                        <a:t>0,8344</a:t>
+                      </a:r>
+                    </a:p>
+                  </a:txBody>
+                  <a:tcPr marL="100319" marR="100319" marT="50159" marB="50159" anchor="ctr"/>
+                </a:tc>
+                <a:tc>
+                  <a:txBody>
+                    <a:bodyPr/>
+                    <a:lstStyle/>
+                    <a:p>
+                      <a:pPr>
+                        <a:buNone/>
+                      </a:pPr>
+                      <a:r>
+                        <a:rPr lang="pt-BR" sz="2000"/>
+                        <a:t>0,9740</a:t>
+                      </a:r>
+                    </a:p>
+                  </a:txBody>
+                  <a:tcPr marL="100319" marR="100319" marT="50159" marB="50159" anchor="ctr"/>
+                </a:tc>
+                <a:extLst>
+                  <a:ext uri="{0D108BD9-81ED-4DB2-BD59-A6C34878D82A}">
+                    <a16:rowId xmlns:a16="http://schemas.microsoft.com/office/drawing/2014/main" val="729303519"/>
+                  </a:ext>
+                </a:extLst>
+              </a:tr>
+              <a:tr h="441404">
+                <a:tc>
+                  <a:txBody>
+                    <a:bodyPr/>
+                    <a:lstStyle/>
+                    <a:p>
+                      <a:pPr>
+                        <a:buNone/>
+                      </a:pPr>
+                      <a:r>
+                        <a:rPr lang="pt-BR" sz="2000"/>
+                        <a:t>ID 19</a:t>
+                      </a:r>
+                    </a:p>
+                  </a:txBody>
+                  <a:tcPr marL="100319" marR="100319" marT="50159" marB="50159" anchor="ctr"/>
+                </a:tc>
+                <a:tc>
+                  <a:txBody>
+                    <a:bodyPr/>
+                    <a:lstStyle/>
+                    <a:p>
+                      <a:pPr>
+                        <a:buNone/>
+                      </a:pPr>
+                      <a:r>
+                        <a:rPr lang="pt-BR" sz="2000"/>
+                        <a:t>0,25483</a:t>
+                      </a:r>
+                    </a:p>
+                  </a:txBody>
+                  <a:tcPr marL="100319" marR="100319" marT="50159" marB="50159" anchor="ctr"/>
+                </a:tc>
+                <a:tc>
+                  <a:txBody>
+                    <a:bodyPr/>
+                    <a:lstStyle/>
+                    <a:p>
+                      <a:pPr>
+                        <a:buNone/>
+                      </a:pPr>
+                      <a:r>
+                        <a:rPr lang="pt-BR" sz="2000"/>
+                        <a:t>2,2826</a:t>
+                      </a:r>
+                    </a:p>
+                  </a:txBody>
+                  <a:tcPr marL="100319" marR="100319" marT="50159" marB="50159" anchor="ctr"/>
+                </a:tc>
+                <a:tc>
+                  <a:txBody>
+                    <a:bodyPr/>
+                    <a:lstStyle/>
+                    <a:p>
+                      <a:pPr>
+                        <a:buNone/>
+                      </a:pPr>
+                      <a:r>
+                        <a:rPr lang="pt-BR" sz="2000"/>
+                        <a:t>0,03683</a:t>
+                      </a:r>
+                    </a:p>
+                  </a:txBody>
+                  <a:tcPr marL="100319" marR="100319" marT="50159" marB="50159" anchor="ctr"/>
+                </a:tc>
+                <a:tc>
+                  <a:txBody>
+                    <a:bodyPr/>
+                    <a:lstStyle/>
+                    <a:p>
+                      <a:pPr>
+                        <a:buNone/>
+                      </a:pPr>
+                      <a:r>
+                        <a:rPr lang="pt-BR" sz="2000"/>
+                        <a:t>0,7971</a:t>
+                      </a:r>
+                    </a:p>
+                  </a:txBody>
+                  <a:tcPr marL="100319" marR="100319" marT="50159" marB="50159" anchor="ctr"/>
+                </a:tc>
+                <a:tc>
+                  <a:txBody>
+                    <a:bodyPr/>
+                    <a:lstStyle/>
+                    <a:p>
+                      <a:pPr>
+                        <a:buNone/>
+                      </a:pPr>
+                      <a:r>
+                        <a:rPr lang="pt-BR" sz="2000"/>
+                        <a:t>0,9724</a:t>
+                      </a:r>
+                    </a:p>
+                  </a:txBody>
+                  <a:tcPr marL="100319" marR="100319" marT="50159" marB="50159" anchor="ctr"/>
+                </a:tc>
+                <a:extLst>
+                  <a:ext uri="{0D108BD9-81ED-4DB2-BD59-A6C34878D82A}">
+                    <a16:rowId xmlns:a16="http://schemas.microsoft.com/office/drawing/2014/main" val="175819933"/>
+                  </a:ext>
+                </a:extLst>
+              </a:tr>
+            </a:tbl>
+          </a:graphicData>
+        </a:graphic>
+      </p:graphicFrame>
+      <p:sp>
+        <p:nvSpPr>
+          <p:cNvPr id="6" name="CaixaDeTexto 5">
+            <a:extLst>
+              <a:ext uri="{FF2B5EF4-FFF2-40B4-BE49-F238E27FC236}">
+                <a16:creationId xmlns:a16="http://schemas.microsoft.com/office/drawing/2014/main" id="{D091BF4F-68B9-2D88-6D55-FBDFD3563AF5}"/>
+              </a:ext>
+            </a:extLst>
+          </p:cNvPr>
+          <p:cNvSpPr txBox="1"/>
+          <p:nvPr/>
+        </p:nvSpPr>
+        <p:spPr>
+          <a:xfrm>
+            <a:off x="2963672" y="5195476"/>
+            <a:ext cx="6121400" cy="1200329"/>
+          </a:xfrm>
+          <a:prstGeom prst="rect">
+            <a:avLst/>
+          </a:prstGeom>
+          <a:noFill/>
+        </p:spPr>
+        <p:txBody>
+          <a:bodyPr wrap="square">
+            <a:spAutoFit/>
+          </a:bodyPr>
+          <a:lstStyle/>
+          <a:p>
+            <a:r>
+              <a:rPr lang="pt-BR" dirty="0" err="1"/>
+              <a:t>SysId</a:t>
+            </a:r>
+            <a:r>
+              <a:rPr lang="pt-BR" dirty="0"/>
+              <a:t> Drive ✅ </a:t>
+            </a:r>
+            <a:r>
+              <a:rPr lang="pt-BR" dirty="0" err="1"/>
+              <a:t>kS</a:t>
+            </a:r>
+            <a:r>
+              <a:rPr lang="pt-BR" dirty="0"/>
+              <a:t> caracterizado ✅ kV caracterizado ✅ kA identificado (~0,038) ✅ Conversão para Phoenix ✅ Validação </a:t>
+            </a:r>
+            <a:r>
+              <a:rPr lang="pt-BR" dirty="0" err="1"/>
+              <a:t>Setpoint</a:t>
+            </a:r>
+            <a:r>
+              <a:rPr lang="pt-BR" dirty="0"/>
+              <a:t> x </a:t>
+            </a:r>
+            <a:r>
+              <a:rPr lang="pt-BR" dirty="0" err="1"/>
+              <a:t>Measured</a:t>
+            </a:r>
+            <a:r>
+              <a:rPr lang="pt-BR" dirty="0"/>
+              <a:t> ✅ Drive </a:t>
+            </a:r>
+            <a:r>
+              <a:rPr lang="pt-BR" dirty="0" err="1"/>
+              <a:t>Feedforward</a:t>
+            </a:r>
+            <a:r>
+              <a:rPr lang="pt-BR" dirty="0"/>
+              <a:t> ✅ FECHADO</a:t>
+            </a:r>
+          </a:p>
+        </p:txBody>
+      </p:sp>
+    </p:spTree>
+    <p:extLst>
+      <p:ext uri="{BB962C8B-B14F-4D97-AF65-F5344CB8AC3E}">
+        <p14:creationId xmlns:p14="http://schemas.microsoft.com/office/powerpoint/2010/main" val="1716704215"/>
       </p:ext>
     </p:extLst>
   </p:cSld>
@@ -8019,7 +10110,7 @@
                         <a:buNone/>
                       </a:pPr>
                       <a:r>
-                        <a:rPr lang="pt-BR" sz="2400"/>
+                        <a:rPr lang="pt-BR" sz="2400" dirty="0"/>
                         <a:t>excelente correspondência</a:t>
                       </a:r>
                     </a:p>
